--- a/fubc-ua/59-Прости мене, Боже (Пісні Спасенних №53).pptx
+++ b/fubc-ua/59-Прости мене, Боже (Пісні Спасенних №53).pptx
@@ -1434,7 +1434,7 @@
               <a:buNone/>
             </a:pPr>
             <a:r>
-              <a:rPr lang="en-US" sz="4500" b="1" dirty="0">
+              <a:rPr lang="en-US" sz="4300" b="1" dirty="0">
                 <a:solidFill>
                   <a:srgbClr val="FFFFFF"/>
                 </a:solidFill>
@@ -1444,14 +1444,14 @@
               </a:rPr>
               <a:t>Прости мене, Боже</a:t>
             </a:r>
-            <a:endParaRPr lang="en-US" sz="4500" dirty="0"/>
+            <a:endParaRPr lang="en-US" sz="4300" dirty="0"/>
           </a:p>
           <a:p>
             <a:pPr algn="ctr" indent="0" marL="0">
               <a:buNone/>
             </a:pPr>
             <a:r>
-              <a:rPr lang="en-US" sz="4500" b="1" dirty="0">
+              <a:rPr lang="en-US" sz="4300" b="1" dirty="0">
                 <a:solidFill>
                   <a:srgbClr val="FFFFFF"/>
                 </a:solidFill>
@@ -1461,7 +1461,7 @@
               </a:rPr>
               <a:t>(Пісні Спасенних №53)</a:t>
             </a:r>
-            <a:endParaRPr lang="en-US" sz="4500" dirty="0"/>
+            <a:endParaRPr lang="en-US" sz="4300" dirty="0"/>
           </a:p>
         </p:txBody>
       </p:sp>
@@ -1522,7 +1522,7 @@
               <a:buNone/>
             </a:pPr>
             <a:r>
-              <a:rPr lang="en-US" sz="4500" b="1" dirty="0">
+              <a:rPr lang="en-US" sz="4300" b="1" dirty="0">
                 <a:solidFill>
                   <a:srgbClr val="FFFFFF"/>
                 </a:solidFill>
@@ -1532,14 +1532,14 @@
               </a:rPr>
               <a:t>Прости мене, Боже, прости, я молю,</a:t>
             </a:r>
-            <a:endParaRPr lang="en-US" sz="4500" dirty="0"/>
+            <a:endParaRPr lang="en-US" sz="4300" dirty="0"/>
           </a:p>
           <a:p>
             <a:pPr algn="ctr" indent="0" marL="0">
               <a:buNone/>
             </a:pPr>
             <a:r>
-              <a:rPr lang="en-US" sz="4500" b="1" dirty="0">
+              <a:rPr lang="en-US" sz="4300" b="1" dirty="0">
                 <a:solidFill>
                   <a:srgbClr val="FFFFFF"/>
                 </a:solidFill>
@@ -1549,14 +1549,14 @@
               </a:rPr>
               <a:t>прости, що так пізно до Тебе я йду,</a:t>
             </a:r>
-            <a:endParaRPr lang="en-US" sz="4500" dirty="0"/>
+            <a:endParaRPr lang="en-US" sz="4300" dirty="0"/>
           </a:p>
           <a:p>
             <a:pPr algn="ctr" indent="0" marL="0">
               <a:buNone/>
             </a:pPr>
             <a:r>
-              <a:rPr lang="en-US" sz="4500" b="1" dirty="0">
+              <a:rPr lang="en-US" sz="4300" b="1" dirty="0">
                 <a:solidFill>
                   <a:srgbClr val="FFFFFF"/>
                 </a:solidFill>
@@ -1566,14 +1566,14 @@
               </a:rPr>
               <a:t>||: прости, що раніше Тебе не пізнав,</a:t>
             </a:r>
-            <a:endParaRPr lang="en-US" sz="4500" dirty="0"/>
+            <a:endParaRPr lang="en-US" sz="4300" dirty="0"/>
           </a:p>
           <a:p>
             <a:pPr algn="ctr" indent="0" marL="0">
               <a:buNone/>
             </a:pPr>
             <a:r>
-              <a:rPr lang="en-US" sz="4500" b="1" dirty="0">
+              <a:rPr lang="en-US" sz="4300" b="1" dirty="0">
                 <a:solidFill>
                   <a:srgbClr val="FFFFFF"/>
                 </a:solidFill>
@@ -1583,7 +1583,7 @@
               </a:rPr>
               <a:t>що довго у світі гріховнім блукав. :||</a:t>
             </a:r>
-            <a:endParaRPr lang="en-US" sz="4500" dirty="0"/>
+            <a:endParaRPr lang="en-US" sz="4300" dirty="0"/>
           </a:p>
         </p:txBody>
       </p:sp>
@@ -1644,7 +1644,7 @@
               <a:buNone/>
             </a:pPr>
             <a:r>
-              <a:rPr lang="en-US" sz="4500" b="1" dirty="0">
+              <a:rPr lang="en-US" sz="4300" b="1" dirty="0">
                 <a:solidFill>
                   <a:srgbClr val="FFFFFF"/>
                 </a:solidFill>
@@ -1654,14 +1654,14 @@
               </a:rPr>
               <a:t>Прости, що мій розум Тебе відхиляв,</a:t>
             </a:r>
-            <a:endParaRPr lang="en-US" sz="4500" dirty="0"/>
+            <a:endParaRPr lang="en-US" sz="4300" dirty="0"/>
           </a:p>
           <a:p>
             <a:pPr algn="ctr" indent="0" marL="0">
               <a:buNone/>
             </a:pPr>
             <a:r>
-              <a:rPr lang="en-US" sz="4500" b="1" dirty="0">
+              <a:rPr lang="en-US" sz="4300" b="1" dirty="0">
                 <a:solidFill>
                   <a:srgbClr val="FFFFFF"/>
                 </a:solidFill>
@@ -1671,14 +1671,14 @@
               </a:rPr>
               <a:t>прости, що страждати Тебе заставляв,</a:t>
             </a:r>
-            <a:endParaRPr lang="en-US" sz="4500" dirty="0"/>
+            <a:endParaRPr lang="en-US" sz="4300" dirty="0"/>
           </a:p>
           <a:p>
             <a:pPr algn="ctr" indent="0" marL="0">
               <a:buNone/>
             </a:pPr>
             <a:r>
-              <a:rPr lang="en-US" sz="4500" b="1" dirty="0">
+              <a:rPr lang="en-US" sz="4300" b="1" dirty="0">
                 <a:solidFill>
                   <a:srgbClr val="FFFFFF"/>
                 </a:solidFill>
@@ -1688,14 +1688,14 @@
               </a:rPr>
               <a:t>||: прости, що я рани Тобі завдавав,</a:t>
             </a:r>
-            <a:endParaRPr lang="en-US" sz="4500" dirty="0"/>
+            <a:endParaRPr lang="en-US" sz="4300" dirty="0"/>
           </a:p>
           <a:p>
             <a:pPr algn="ctr" indent="0" marL="0">
               <a:buNone/>
             </a:pPr>
             <a:r>
-              <a:rPr lang="en-US" sz="4500" b="1" dirty="0">
+              <a:rPr lang="en-US" sz="4300" b="1" dirty="0">
                 <a:solidFill>
                   <a:srgbClr val="FFFFFF"/>
                 </a:solidFill>
@@ -1705,7 +1705,7 @@
               </a:rPr>
               <a:t>що знов на хресті я Тебе розпинав. :||</a:t>
             </a:r>
-            <a:endParaRPr lang="en-US" sz="4500" dirty="0"/>
+            <a:endParaRPr lang="en-US" sz="4300" dirty="0"/>
           </a:p>
         </p:txBody>
       </p:sp>
@@ -1766,7 +1766,7 @@
               <a:buNone/>
             </a:pPr>
             <a:r>
-              <a:rPr lang="en-US" sz="4500" b="1" dirty="0">
+              <a:rPr lang="en-US" sz="4300" b="1" dirty="0">
                 <a:solidFill>
                   <a:srgbClr val="FFFFFF"/>
                 </a:solidFill>
@@ -1776,14 +1776,14 @@
               </a:rPr>
               <a:t>А Ти до нового життя пробудив,</a:t>
             </a:r>
-            <a:endParaRPr lang="en-US" sz="4500" dirty="0"/>
+            <a:endParaRPr lang="en-US" sz="4300" dirty="0"/>
           </a:p>
           <a:p>
             <a:pPr algn="ctr" indent="0" marL="0">
               <a:buNone/>
             </a:pPr>
             <a:r>
-              <a:rPr lang="en-US" sz="4500" b="1" dirty="0">
+              <a:rPr lang="en-US" sz="4300" b="1" dirty="0">
                 <a:solidFill>
                   <a:srgbClr val="FFFFFF"/>
                 </a:solidFill>
@@ -1793,14 +1793,14 @@
               </a:rPr>
               <a:t>і серце, і душу мені обновив,</a:t>
             </a:r>
-            <a:endParaRPr lang="en-US" sz="4500" dirty="0"/>
+            <a:endParaRPr lang="en-US" sz="4300" dirty="0"/>
           </a:p>
           <a:p>
             <a:pPr algn="ctr" indent="0" marL="0">
               <a:buNone/>
             </a:pPr>
             <a:r>
-              <a:rPr lang="en-US" sz="4500" b="1" dirty="0">
+              <a:rPr lang="en-US" sz="4300" b="1" dirty="0">
                 <a:solidFill>
                   <a:srgbClr val="FFFFFF"/>
                 </a:solidFill>
@@ -1810,14 +1810,14 @@
               </a:rPr>
               <a:t>||: і очі відкрив Ти на пройдений шлях,</a:t>
             </a:r>
-            <a:endParaRPr lang="en-US" sz="4500" dirty="0"/>
+            <a:endParaRPr lang="en-US" sz="4300" dirty="0"/>
           </a:p>
           <a:p>
             <a:pPr algn="ctr" indent="0" marL="0">
               <a:buNone/>
             </a:pPr>
             <a:r>
-              <a:rPr lang="en-US" sz="4500" b="1" dirty="0">
+              <a:rPr lang="en-US" sz="4300" b="1" dirty="0">
                 <a:solidFill>
                   <a:srgbClr val="FFFFFF"/>
                 </a:solidFill>
@@ -1827,7 +1827,7 @@
               </a:rPr>
               <a:t>не дав потонути в невірʼї, в гріхах. :||</a:t>
             </a:r>
-            <a:endParaRPr lang="en-US" sz="4500" dirty="0"/>
+            <a:endParaRPr lang="en-US" sz="4300" dirty="0"/>
           </a:p>
         </p:txBody>
       </p:sp>
@@ -1888,7 +1888,7 @@
               <a:buNone/>
             </a:pPr>
             <a:r>
-              <a:rPr lang="en-US" sz="4500" b="1" dirty="0">
+              <a:rPr lang="en-US" sz="4300" b="1" dirty="0">
                 <a:solidFill>
                   <a:srgbClr val="FFFFFF"/>
                 </a:solidFill>
@@ -1898,14 +1898,14 @@
               </a:rPr>
               <a:t>І ось я в молитві покірно стою,</a:t>
             </a:r>
-            <a:endParaRPr lang="en-US" sz="4500" dirty="0"/>
+            <a:endParaRPr lang="en-US" sz="4300" dirty="0"/>
           </a:p>
           <a:p>
             <a:pPr algn="ctr" indent="0" marL="0">
               <a:buNone/>
             </a:pPr>
             <a:r>
-              <a:rPr lang="en-US" sz="4500" b="1" dirty="0">
+              <a:rPr lang="en-US" sz="4300" b="1" dirty="0">
                 <a:solidFill>
                   <a:srgbClr val="FFFFFF"/>
                 </a:solidFill>
@@ -1915,14 +1915,14 @@
               </a:rPr>
               <a:t>життя все навіки Тобі віддаю,</a:t>
             </a:r>
-            <a:endParaRPr lang="en-US" sz="4500" dirty="0"/>
+            <a:endParaRPr lang="en-US" sz="4300" dirty="0"/>
           </a:p>
           <a:p>
             <a:pPr algn="ctr" indent="0" marL="0">
               <a:buNone/>
             </a:pPr>
             <a:r>
-              <a:rPr lang="en-US" sz="4500" b="1" dirty="0">
+              <a:rPr lang="en-US" sz="4300" b="1" dirty="0">
                 <a:solidFill>
                   <a:srgbClr val="FFFFFF"/>
                 </a:solidFill>
@@ -1932,14 +1932,14 @@
               </a:rPr>
               <a:t>||: я хочу належати тільки Тобі –</a:t>
             </a:r>
-            <a:endParaRPr lang="en-US" sz="4500" dirty="0"/>
+            <a:endParaRPr lang="en-US" sz="4300" dirty="0"/>
           </a:p>
           <a:p>
             <a:pPr algn="ctr" indent="0" marL="0">
               <a:buNone/>
             </a:pPr>
             <a:r>
-              <a:rPr lang="en-US" sz="4500" b="1" dirty="0">
+              <a:rPr lang="en-US" sz="4300" b="1" dirty="0">
                 <a:solidFill>
                   <a:srgbClr val="FFFFFF"/>
                 </a:solidFill>
@@ -1949,7 +1949,7 @@
               </a:rPr>
               <a:t>підтримай мене у земній боротьбі. :||</a:t>
             </a:r>
-            <a:endParaRPr lang="en-US" sz="4500" dirty="0"/>
+            <a:endParaRPr lang="en-US" sz="4300" dirty="0"/>
           </a:p>
         </p:txBody>
       </p:sp>
@@ -2010,7 +2010,7 @@
               <a:buNone/>
             </a:pPr>
             <a:r>
-              <a:rPr lang="en-US" sz="4500" b="1" dirty="0">
+              <a:rPr lang="en-US" sz="4300" b="1" dirty="0">
                 <a:solidFill>
                   <a:srgbClr val="FFFFFF"/>
                 </a:solidFill>
@@ -2020,14 +2020,14 @@
               </a:rPr>
               <a:t>Я словом і ділом прославлю Тебе</a:t>
             </a:r>
-            <a:endParaRPr lang="en-US" sz="4500" dirty="0"/>
+            <a:endParaRPr lang="en-US" sz="4300" dirty="0"/>
           </a:p>
           <a:p>
             <a:pPr algn="ctr" indent="0" marL="0">
               <a:buNone/>
             </a:pPr>
             <a:r>
-              <a:rPr lang="en-US" sz="4500" b="1" dirty="0">
+              <a:rPr lang="en-US" sz="4300" b="1" dirty="0">
                 <a:solidFill>
                   <a:srgbClr val="FFFFFF"/>
                 </a:solidFill>
@@ -2037,14 +2037,14 @@
               </a:rPr>
               <a:t>і вірю, що в небо Ти візьмеш мене.</a:t>
             </a:r>
-            <a:endParaRPr lang="en-US" sz="4500" dirty="0"/>
+            <a:endParaRPr lang="en-US" sz="4300" dirty="0"/>
           </a:p>
           <a:p>
             <a:pPr algn="ctr" indent="0" marL="0">
               <a:buNone/>
             </a:pPr>
             <a:r>
-              <a:rPr lang="en-US" sz="4500" b="1" dirty="0">
+              <a:rPr lang="en-US" sz="4300" b="1" dirty="0">
                 <a:solidFill>
                   <a:srgbClr val="FFFFFF"/>
                 </a:solidFill>
@@ -2054,14 +2054,14 @@
               </a:rPr>
               <a:t>||: Хай світло засяє у вчинках моїх</a:t>
             </a:r>
-            <a:endParaRPr lang="en-US" sz="4500" dirty="0"/>
+            <a:endParaRPr lang="en-US" sz="4300" dirty="0"/>
           </a:p>
           <a:p>
             <a:pPr algn="ctr" indent="0" marL="0">
               <a:buNone/>
             </a:pPr>
             <a:r>
-              <a:rPr lang="en-US" sz="4500" b="1" dirty="0">
+              <a:rPr lang="en-US" sz="4300" b="1" dirty="0">
                 <a:solidFill>
                   <a:srgbClr val="FFFFFF"/>
                 </a:solidFill>
@@ -2071,7 +2071,7 @@
               </a:rPr>
               <a:t>і вабить постійно до Тебе усіх. :||</a:t>
             </a:r>
-            <a:endParaRPr lang="en-US" sz="4500" dirty="0"/>
+            <a:endParaRPr lang="en-US" sz="4300" dirty="0"/>
           </a:p>
         </p:txBody>
       </p:sp>

--- a/fubc-ua/59-Прости мене, Боже (Пісні Спасенних №53).pptx
+++ b/fubc-ua/59-Прости мене, Боже (Пісні Спасенних №53).pptx
@@ -596,7 +596,7 @@
           <a:p>
             <a:r>
               <a:rPr lang="en-US" dirty="0"/>
-              <a:t>1 · 1/1</a:t>
+              <a:t>1 · 1/1 · ||:3-4:|| · rows:2,1,2,2</a:t>
             </a:r>
             <a:endParaRPr lang="en-US" dirty="0"/>
           </a:p>
@@ -684,7 +684,7 @@
           <a:p>
             <a:r>
               <a:rPr lang="en-US" dirty="0"/>
-              <a:t>2 · 1/1</a:t>
+              <a:t>2 · 1/1 · ||:3-4:|| · rows:1,2,2,2</a:t>
             </a:r>
             <a:endParaRPr lang="en-US" dirty="0"/>
           </a:p>
@@ -772,7 +772,7 @@
           <a:p>
             <a:r>
               <a:rPr lang="en-US" dirty="0"/>
-              <a:t>3 · 1/1</a:t>
+              <a:t>3 · 1/1 · ||:3-4:|| · rows:1,1,2,2</a:t>
             </a:r>
             <a:endParaRPr lang="en-US" dirty="0"/>
           </a:p>
@@ -860,7 +860,7 @@
           <a:p>
             <a:r>
               <a:rPr lang="en-US" dirty="0"/>
-              <a:t>4 · 1/1</a:t>
+              <a:t>4 · 1/1 · ||:3-4:|| · rows:1,1,2,2</a:t>
             </a:r>
             <a:endParaRPr lang="en-US" dirty="0"/>
           </a:p>
@@ -948,7 +948,7 @@
           <a:p>
             <a:r>
               <a:rPr lang="en-US" dirty="0"/>
-              <a:t>5 · 1/1</a:t>
+              <a:t>5 · 1/1 · ||:3-4:|| · rows:1,2,2,2</a:t>
             </a:r>
             <a:endParaRPr lang="en-US" dirty="0"/>
           </a:p>
@@ -1434,7 +1434,7 @@
               <a:buNone/>
             </a:pPr>
             <a:r>
-              <a:rPr lang="en-US" sz="4300" b="1" dirty="0">
+              <a:rPr lang="en-US" sz="5200" b="1" dirty="0">
                 <a:solidFill>
                   <a:srgbClr val="FFFFFF"/>
                 </a:solidFill>
@@ -1444,14 +1444,14 @@
               </a:rPr>
               <a:t>Прости мене, Боже</a:t>
             </a:r>
-            <a:endParaRPr lang="en-US" sz="4300" dirty="0"/>
-          </a:p>
-          <a:p>
-            <a:pPr algn="ctr" indent="0" marL="0">
-              <a:buNone/>
-            </a:pPr>
-            <a:r>
-              <a:rPr lang="en-US" sz="4300" b="1" dirty="0">
+            <a:endParaRPr lang="en-US" sz="5200" dirty="0"/>
+          </a:p>
+          <a:p>
+            <a:pPr algn="ctr" indent="0" marL="0">
+              <a:buNone/>
+            </a:pPr>
+            <a:r>
+              <a:rPr lang="en-US" sz="5200" b="1" dirty="0">
                 <a:solidFill>
                   <a:srgbClr val="FFFFFF"/>
                 </a:solidFill>
@@ -1461,7 +1461,7 @@
               </a:rPr>
               <a:t>(Пісні Спасенних №53)</a:t>
             </a:r>
-            <a:endParaRPr lang="en-US" sz="4300" dirty="0"/>
+            <a:endParaRPr lang="en-US" sz="5200" dirty="0"/>
           </a:p>
         </p:txBody>
       </p:sp>
@@ -1519,27 +1519,53 @@
           <a:lstStyle/>
           <a:p>
             <a:pPr algn="ctr" indent="0" marL="0">
-              <a:buNone/>
-            </a:pPr>
-            <a:r>
-              <a:rPr lang="en-US" sz="4300" b="1" dirty="0">
-                <a:solidFill>
-                  <a:srgbClr val="FFFFFF"/>
-                </a:solidFill>
-                <a:latin typeface="Arial" pitchFamily="34" charset="0"/>
-                <a:ea typeface="Arial" pitchFamily="34" charset="-122"/>
-                <a:cs typeface="Arial" pitchFamily="34" charset="-120"/>
-              </a:rPr>
-              <a:t>Прости мене, Боже, прости, я молю,</a:t>
-            </a:r>
-            <a:endParaRPr lang="en-US" sz="4300" dirty="0"/>
-          </a:p>
-          <a:p>
-            <a:pPr algn="ctr" indent="0" marL="0">
-              <a:buNone/>
-            </a:pPr>
-            <a:r>
-              <a:rPr lang="en-US" sz="4300" b="1" dirty="0">
+              <a:lnSpc>
+                <a:spcPts val="6100"/>
+              </a:lnSpc>
+              <a:buNone/>
+            </a:pPr>
+            <a:r>
+              <a:rPr lang="en-US" sz="5100" b="1" dirty="0">
+                <a:solidFill>
+                  <a:srgbClr val="FFFFFF"/>
+                </a:solidFill>
+                <a:latin typeface="Arial" pitchFamily="34" charset="0"/>
+                <a:ea typeface="Arial" pitchFamily="34" charset="-122"/>
+                <a:cs typeface="Arial" pitchFamily="34" charset="-120"/>
+              </a:rPr>
+              <a:t>Прости мене, Боже,</a:t>
+            </a:r>
+            <a:endParaRPr lang="en-US" sz="5100" dirty="0"/>
+          </a:p>
+          <a:p>
+            <a:pPr algn="ctr" indent="0" marL="0">
+              <a:lnSpc>
+                <a:spcPts val="6100"/>
+              </a:lnSpc>
+              <a:buNone/>
+            </a:pPr>
+            <a:r>
+              <a:rPr lang="en-US" sz="5100" b="1" dirty="0">
+                <a:solidFill>
+                  <a:srgbClr val="FFFFFF"/>
+                </a:solidFill>
+                <a:latin typeface="Arial" pitchFamily="34" charset="0"/>
+                <a:ea typeface="Arial" pitchFamily="34" charset="-122"/>
+                <a:cs typeface="Arial" pitchFamily="34" charset="-120"/>
+              </a:rPr>
+              <a:t>прости, я молю,</a:t>
+            </a:r>
+            <a:endParaRPr lang="en-US" sz="5100" dirty="0"/>
+          </a:p>
+          <a:p>
+            <a:pPr algn="ctr" indent="0" marL="0">
+              <a:lnSpc>
+                <a:spcPts val="6100"/>
+              </a:lnSpc>
+              <a:buNone/>
+            </a:pPr>
+            <a:r>
+              <a:rPr lang="en-US" sz="5100" b="1" dirty="0">
                 <a:solidFill>
                   <a:srgbClr val="FFFFFF"/>
                 </a:solidFill>
@@ -1549,41 +1575,172 @@
               </a:rPr>
               <a:t>прости, що так пізно до Тебе я йду,</a:t>
             </a:r>
-            <a:endParaRPr lang="en-US" sz="4300" dirty="0"/>
-          </a:p>
-          <a:p>
-            <a:pPr algn="ctr" indent="0" marL="0">
-              <a:buNone/>
-            </a:pPr>
-            <a:r>
-              <a:rPr lang="en-US" sz="4300" b="1" dirty="0">
-                <a:solidFill>
-                  <a:srgbClr val="FFFFFF"/>
-                </a:solidFill>
-                <a:latin typeface="Arial" pitchFamily="34" charset="0"/>
-                <a:ea typeface="Arial" pitchFamily="34" charset="-122"/>
-                <a:cs typeface="Arial" pitchFamily="34" charset="-120"/>
-              </a:rPr>
-              <a:t>||: прости, що раніше Тебе не пізнав,</a:t>
-            </a:r>
-            <a:endParaRPr lang="en-US" sz="4300" dirty="0"/>
-          </a:p>
-          <a:p>
-            <a:pPr algn="ctr" indent="0" marL="0">
-              <a:buNone/>
-            </a:pPr>
-            <a:r>
-              <a:rPr lang="en-US" sz="4300" b="1" dirty="0">
-                <a:solidFill>
-                  <a:srgbClr val="FFFFFF"/>
-                </a:solidFill>
-                <a:latin typeface="Arial" pitchFamily="34" charset="0"/>
-                <a:ea typeface="Arial" pitchFamily="34" charset="-122"/>
-                <a:cs typeface="Arial" pitchFamily="34" charset="-120"/>
-              </a:rPr>
-              <a:t>що довго у світі гріховнім блукав. :||</a:t>
-            </a:r>
-            <a:endParaRPr lang="en-US" sz="4300" dirty="0"/>
+            <a:endParaRPr lang="en-US" sz="5100" dirty="0"/>
+          </a:p>
+          <a:p>
+            <a:pPr algn="ctr" indent="0" marL="0">
+              <a:lnSpc>
+                <a:spcPts val="6100"/>
+              </a:lnSpc>
+              <a:buNone/>
+            </a:pPr>
+            <a:r>
+              <a:rPr lang="en-US" sz="5100" b="1" dirty="0">
+                <a:solidFill>
+                  <a:srgbClr val="FFFFFF"/>
+                </a:solidFill>
+                <a:latin typeface="Arial" pitchFamily="34" charset="0"/>
+                <a:ea typeface="Arial" pitchFamily="34" charset="-122"/>
+                <a:cs typeface="Arial" pitchFamily="34" charset="-120"/>
+              </a:rPr>
+              <a:t>прости, що раніше</a:t>
+            </a:r>
+            <a:endParaRPr lang="en-US" sz="5100" dirty="0"/>
+          </a:p>
+          <a:p>
+            <a:pPr algn="ctr" indent="0" marL="0">
+              <a:lnSpc>
+                <a:spcPts val="6100"/>
+              </a:lnSpc>
+              <a:buNone/>
+            </a:pPr>
+            <a:r>
+              <a:rPr lang="en-US" sz="5100" b="1" dirty="0">
+                <a:solidFill>
+                  <a:srgbClr val="FFFFFF"/>
+                </a:solidFill>
+                <a:latin typeface="Arial" pitchFamily="34" charset="0"/>
+                <a:ea typeface="Arial" pitchFamily="34" charset="-122"/>
+                <a:cs typeface="Arial" pitchFamily="34" charset="-120"/>
+              </a:rPr>
+              <a:t>Тебе не пізнав,</a:t>
+            </a:r>
+            <a:endParaRPr lang="en-US" sz="5100" dirty="0"/>
+          </a:p>
+          <a:p>
+            <a:pPr algn="ctr" indent="0" marL="0">
+              <a:lnSpc>
+                <a:spcPts val="6100"/>
+              </a:lnSpc>
+              <a:buNone/>
+            </a:pPr>
+            <a:r>
+              <a:rPr lang="en-US" sz="5100" b="1" dirty="0">
+                <a:solidFill>
+                  <a:srgbClr val="FFFFFF"/>
+                </a:solidFill>
+                <a:latin typeface="Arial" pitchFamily="34" charset="0"/>
+                <a:ea typeface="Arial" pitchFamily="34" charset="-122"/>
+                <a:cs typeface="Arial" pitchFamily="34" charset="-120"/>
+              </a:rPr>
+              <a:t>що довго у світі</a:t>
+            </a:r>
+            <a:endParaRPr lang="en-US" sz="5100" dirty="0"/>
+          </a:p>
+          <a:p>
+            <a:pPr algn="ctr" indent="0" marL="0">
+              <a:lnSpc>
+                <a:spcPts val="6100"/>
+              </a:lnSpc>
+              <a:buNone/>
+            </a:pPr>
+            <a:r>
+              <a:rPr lang="en-US" sz="5100" b="1" dirty="0">
+                <a:solidFill>
+                  <a:srgbClr val="FFFFFF"/>
+                </a:solidFill>
+                <a:latin typeface="Arial" pitchFamily="34" charset="0"/>
+                <a:ea typeface="Arial" pitchFamily="34" charset="-122"/>
+                <a:cs typeface="Arial" pitchFamily="34" charset="-120"/>
+              </a:rPr>
+              <a:t>гріховнім блукав.</a:t>
+            </a:r>
+            <a:endParaRPr lang="en-US" sz="5100" dirty="0"/>
+          </a:p>
+        </p:txBody>
+      </p:sp>
+      <p:sp>
+        <p:nvSpPr>
+          <p:cNvPr id="3" name="Shape 1"/>
+          <p:cNvSpPr/>
+          <p:nvPr/>
+        </p:nvSpPr>
+        <p:spPr>
+          <a:xfrm>
+            <a:off x="2888399" y="3156966"/>
+            <a:ext cx="0" cy="2914650"/>
+          </a:xfrm>
+          <a:prstGeom prst="line">
+            <a:avLst/>
+          </a:prstGeom>
+          <a:noFill/>
+          <a:ln w="24912">
+            <a:solidFill>
+              <a:srgbClr val="8A8A8A"/>
+            </a:solidFill>
+            <a:prstDash val="solid"/>
+          </a:ln>
+        </p:spPr>
+      </p:sp>
+      <p:sp>
+        <p:nvSpPr>
+          <p:cNvPr id="4" name="Shape 2"/>
+          <p:cNvSpPr/>
+          <p:nvPr/>
+        </p:nvSpPr>
+        <p:spPr>
+          <a:xfrm>
+            <a:off x="9309697" y="3156966"/>
+            <a:ext cx="0" cy="2914650"/>
+          </a:xfrm>
+          <a:prstGeom prst="line">
+            <a:avLst/>
+          </a:prstGeom>
+          <a:noFill/>
+          <a:ln w="24912">
+            <a:solidFill>
+              <a:srgbClr val="8A8A8A"/>
+            </a:solidFill>
+            <a:prstDash val="solid"/>
+          </a:ln>
+        </p:spPr>
+      </p:sp>
+      <p:sp>
+        <p:nvSpPr>
+          <p:cNvPr id="5" name="Text 3"/>
+          <p:cNvSpPr txBox="1"/>
+          <p:nvPr/>
+        </p:nvSpPr>
+        <p:spPr>
+          <a:xfrm>
+            <a:off x="9406852" y="4294251"/>
+            <a:ext cx="1097280" cy="640080"/>
+          </a:xfrm>
+          <a:prstGeom prst="rect">
+            <a:avLst/>
+          </a:prstGeom>
+          <a:noFill/>
+          <a:ln/>
+        </p:spPr>
+        <p:txBody>
+          <a:bodyPr wrap="square" lIns="0" tIns="0" rIns="0" bIns="0" rtlCol="0" anchor="ctr"/>
+          <a:lstStyle/>
+          <a:p>
+            <a:pPr algn="l" indent="0" marL="0">
+              <a:buNone/>
+            </a:pPr>
+            <a:r>
+              <a:rPr lang="en-US" sz="3600" b="1" dirty="0">
+                <a:solidFill>
+                  <a:srgbClr val="BBBBBB"/>
+                </a:solidFill>
+                <a:latin typeface="Arial" pitchFamily="34" charset="0"/>
+                <a:ea typeface="Arial" pitchFamily="34" charset="-122"/>
+                <a:cs typeface="Arial" pitchFamily="34" charset="-120"/>
+              </a:rPr>
+              <a:t>×2</a:t>
+            </a:r>
+            <a:endParaRPr lang="en-US" sz="3600" dirty="0"/>
           </a:p>
         </p:txBody>
       </p:sp>
@@ -1641,10 +1798,13 @@
           <a:lstStyle/>
           <a:p>
             <a:pPr algn="ctr" indent="0" marL="0">
-              <a:buNone/>
-            </a:pPr>
-            <a:r>
-              <a:rPr lang="en-US" sz="4300" b="1" dirty="0">
+              <a:lnSpc>
+                <a:spcPts val="5800"/>
+              </a:lnSpc>
+              <a:buNone/>
+            </a:pPr>
+            <a:r>
+              <a:rPr lang="en-US" sz="4800" b="1" dirty="0">
                 <a:solidFill>
                   <a:srgbClr val="FFFFFF"/>
                 </a:solidFill>
@@ -1654,58 +1814,212 @@
               </a:rPr>
               <a:t>Прости, що мій розум Тебе відхиляв,</a:t>
             </a:r>
-            <a:endParaRPr lang="en-US" sz="4300" dirty="0"/>
-          </a:p>
-          <a:p>
-            <a:pPr algn="ctr" indent="0" marL="0">
-              <a:buNone/>
-            </a:pPr>
-            <a:r>
-              <a:rPr lang="en-US" sz="4300" b="1" dirty="0">
-                <a:solidFill>
-                  <a:srgbClr val="FFFFFF"/>
-                </a:solidFill>
-                <a:latin typeface="Arial" pitchFamily="34" charset="0"/>
-                <a:ea typeface="Arial" pitchFamily="34" charset="-122"/>
-                <a:cs typeface="Arial" pitchFamily="34" charset="-120"/>
-              </a:rPr>
-              <a:t>прости, що страждати Тебе заставляв,</a:t>
-            </a:r>
-            <a:endParaRPr lang="en-US" sz="4300" dirty="0"/>
-          </a:p>
-          <a:p>
-            <a:pPr algn="ctr" indent="0" marL="0">
-              <a:buNone/>
-            </a:pPr>
-            <a:r>
-              <a:rPr lang="en-US" sz="4300" b="1" dirty="0">
-                <a:solidFill>
-                  <a:srgbClr val="FFFFFF"/>
-                </a:solidFill>
-                <a:latin typeface="Arial" pitchFamily="34" charset="0"/>
-                <a:ea typeface="Arial" pitchFamily="34" charset="-122"/>
-                <a:cs typeface="Arial" pitchFamily="34" charset="-120"/>
-              </a:rPr>
-              <a:t>||: прости, що я рани Тобі завдавав,</a:t>
-            </a:r>
-            <a:endParaRPr lang="en-US" sz="4300" dirty="0"/>
-          </a:p>
-          <a:p>
-            <a:pPr algn="ctr" indent="0" marL="0">
-              <a:buNone/>
-            </a:pPr>
-            <a:r>
-              <a:rPr lang="en-US" sz="4300" b="1" dirty="0">
-                <a:solidFill>
-                  <a:srgbClr val="FFFFFF"/>
-                </a:solidFill>
-                <a:latin typeface="Arial" pitchFamily="34" charset="0"/>
-                <a:ea typeface="Arial" pitchFamily="34" charset="-122"/>
-                <a:cs typeface="Arial" pitchFamily="34" charset="-120"/>
-              </a:rPr>
-              <a:t>що знов на хресті я Тебе розпинав. :||</a:t>
-            </a:r>
-            <a:endParaRPr lang="en-US" sz="4300" dirty="0"/>
+            <a:endParaRPr lang="en-US" sz="4800" dirty="0"/>
+          </a:p>
+          <a:p>
+            <a:pPr algn="ctr" indent="0" marL="0">
+              <a:lnSpc>
+                <a:spcPts val="5800"/>
+              </a:lnSpc>
+              <a:buNone/>
+            </a:pPr>
+            <a:r>
+              <a:rPr lang="en-US" sz="4800" b="1" dirty="0">
+                <a:solidFill>
+                  <a:srgbClr val="FFFFFF"/>
+                </a:solidFill>
+                <a:latin typeface="Arial" pitchFamily="34" charset="0"/>
+                <a:ea typeface="Arial" pitchFamily="34" charset="-122"/>
+                <a:cs typeface="Arial" pitchFamily="34" charset="-120"/>
+              </a:rPr>
+              <a:t>прости, що страждати</a:t>
+            </a:r>
+            <a:endParaRPr lang="en-US" sz="4800" dirty="0"/>
+          </a:p>
+          <a:p>
+            <a:pPr algn="ctr" indent="0" marL="0">
+              <a:lnSpc>
+                <a:spcPts val="5800"/>
+              </a:lnSpc>
+              <a:buNone/>
+            </a:pPr>
+            <a:r>
+              <a:rPr lang="en-US" sz="4800" b="1" dirty="0">
+                <a:solidFill>
+                  <a:srgbClr val="FFFFFF"/>
+                </a:solidFill>
+                <a:latin typeface="Arial" pitchFamily="34" charset="0"/>
+                <a:ea typeface="Arial" pitchFamily="34" charset="-122"/>
+                <a:cs typeface="Arial" pitchFamily="34" charset="-120"/>
+              </a:rPr>
+              <a:t>Тебе заставляв,</a:t>
+            </a:r>
+            <a:endParaRPr lang="en-US" sz="4800" dirty="0"/>
+          </a:p>
+          <a:p>
+            <a:pPr algn="ctr" indent="0" marL="0">
+              <a:lnSpc>
+                <a:spcPts val="5800"/>
+              </a:lnSpc>
+              <a:buNone/>
+            </a:pPr>
+            <a:r>
+              <a:rPr lang="en-US" sz="4800" b="1" dirty="0">
+                <a:solidFill>
+                  <a:srgbClr val="FFFFFF"/>
+                </a:solidFill>
+                <a:latin typeface="Arial" pitchFamily="34" charset="0"/>
+                <a:ea typeface="Arial" pitchFamily="34" charset="-122"/>
+                <a:cs typeface="Arial" pitchFamily="34" charset="-120"/>
+              </a:rPr>
+              <a:t>прости, що я рани</a:t>
+            </a:r>
+            <a:endParaRPr lang="en-US" sz="4800" dirty="0"/>
+          </a:p>
+          <a:p>
+            <a:pPr algn="ctr" indent="0" marL="0">
+              <a:lnSpc>
+                <a:spcPts val="5800"/>
+              </a:lnSpc>
+              <a:buNone/>
+            </a:pPr>
+            <a:r>
+              <a:rPr lang="en-US" sz="4800" b="1" dirty="0">
+                <a:solidFill>
+                  <a:srgbClr val="FFFFFF"/>
+                </a:solidFill>
+                <a:latin typeface="Arial" pitchFamily="34" charset="0"/>
+                <a:ea typeface="Arial" pitchFamily="34" charset="-122"/>
+                <a:cs typeface="Arial" pitchFamily="34" charset="-120"/>
+              </a:rPr>
+              <a:t>Тобі завдавав,</a:t>
+            </a:r>
+            <a:endParaRPr lang="en-US" sz="4800" dirty="0"/>
+          </a:p>
+          <a:p>
+            <a:pPr algn="ctr" indent="0" marL="0">
+              <a:lnSpc>
+                <a:spcPts val="5800"/>
+              </a:lnSpc>
+              <a:buNone/>
+            </a:pPr>
+            <a:r>
+              <a:rPr lang="en-US" sz="4800" b="1" dirty="0">
+                <a:solidFill>
+                  <a:srgbClr val="FFFFFF"/>
+                </a:solidFill>
+                <a:latin typeface="Arial" pitchFamily="34" charset="0"/>
+                <a:ea typeface="Arial" pitchFamily="34" charset="-122"/>
+                <a:cs typeface="Arial" pitchFamily="34" charset="-120"/>
+              </a:rPr>
+              <a:t>що знов на хресті</a:t>
+            </a:r>
+            <a:endParaRPr lang="en-US" sz="4800" dirty="0"/>
+          </a:p>
+          <a:p>
+            <a:pPr algn="ctr" indent="0" marL="0">
+              <a:lnSpc>
+                <a:spcPts val="5800"/>
+              </a:lnSpc>
+              <a:buNone/>
+            </a:pPr>
+            <a:r>
+              <a:rPr lang="en-US" sz="4800" b="1" dirty="0">
+                <a:solidFill>
+                  <a:srgbClr val="FFFFFF"/>
+                </a:solidFill>
+                <a:latin typeface="Arial" pitchFamily="34" charset="0"/>
+                <a:ea typeface="Arial" pitchFamily="34" charset="-122"/>
+                <a:cs typeface="Arial" pitchFamily="34" charset="-120"/>
+              </a:rPr>
+              <a:t>я Тебе розпинав.</a:t>
+            </a:r>
+            <a:endParaRPr lang="en-US" sz="4800" dirty="0"/>
+          </a:p>
+        </p:txBody>
+      </p:sp>
+      <p:sp>
+        <p:nvSpPr>
+          <p:cNvPr id="3" name="Shape 1"/>
+          <p:cNvSpPr/>
+          <p:nvPr/>
+        </p:nvSpPr>
+        <p:spPr>
+          <a:xfrm>
+            <a:off x="3135478" y="3172968"/>
+            <a:ext cx="0" cy="2743200"/>
+          </a:xfrm>
+          <a:prstGeom prst="line">
+            <a:avLst/>
+          </a:prstGeom>
+          <a:noFill/>
+          <a:ln w="23446">
+            <a:solidFill>
+              <a:srgbClr val="8A8A8A"/>
+            </a:solidFill>
+            <a:prstDash val="solid"/>
+          </a:ln>
+        </p:spPr>
+      </p:sp>
+      <p:sp>
+        <p:nvSpPr>
+          <p:cNvPr id="4" name="Shape 2"/>
+          <p:cNvSpPr/>
+          <p:nvPr/>
+        </p:nvSpPr>
+        <p:spPr>
+          <a:xfrm>
+            <a:off x="9062618" y="3172968"/>
+            <a:ext cx="0" cy="2743200"/>
+          </a:xfrm>
+          <a:prstGeom prst="line">
+            <a:avLst/>
+          </a:prstGeom>
+          <a:noFill/>
+          <a:ln w="23446">
+            <a:solidFill>
+              <a:srgbClr val="8A8A8A"/>
+            </a:solidFill>
+            <a:prstDash val="solid"/>
+          </a:ln>
+        </p:spPr>
+      </p:sp>
+      <p:sp>
+        <p:nvSpPr>
+          <p:cNvPr id="5" name="Text 3"/>
+          <p:cNvSpPr txBox="1"/>
+          <p:nvPr/>
+        </p:nvSpPr>
+        <p:spPr>
+          <a:xfrm>
+            <a:off x="9154058" y="4242308"/>
+            <a:ext cx="1036320" cy="604520"/>
+          </a:xfrm>
+          <a:prstGeom prst="rect">
+            <a:avLst/>
+          </a:prstGeom>
+          <a:noFill/>
+          <a:ln/>
+        </p:spPr>
+        <p:txBody>
+          <a:bodyPr wrap="square" lIns="0" tIns="0" rIns="0" bIns="0" rtlCol="0" anchor="ctr"/>
+          <a:lstStyle/>
+          <a:p>
+            <a:pPr algn="l" indent="0" marL="0">
+              <a:buNone/>
+            </a:pPr>
+            <a:r>
+              <a:rPr lang="en-US" sz="3400" b="1" dirty="0">
+                <a:solidFill>
+                  <a:srgbClr val="BBBBBB"/>
+                </a:solidFill>
+                <a:latin typeface="Arial" pitchFamily="34" charset="0"/>
+                <a:ea typeface="Arial" pitchFamily="34" charset="-122"/>
+                <a:cs typeface="Arial" pitchFamily="34" charset="-120"/>
+              </a:rPr>
+              <a:t>×2</a:t>
+            </a:r>
+            <a:endParaRPr lang="en-US" sz="3400" dirty="0"/>
           </a:p>
         </p:txBody>
       </p:sp>
@@ -1763,10 +2077,13 @@
           <a:lstStyle/>
           <a:p>
             <a:pPr algn="ctr" indent="0" marL="0">
-              <a:buNone/>
-            </a:pPr>
-            <a:r>
-              <a:rPr lang="en-US" sz="4300" b="1" dirty="0">
+              <a:lnSpc>
+                <a:spcPts val="6200"/>
+              </a:lnSpc>
+              <a:buNone/>
+            </a:pPr>
+            <a:r>
+              <a:rPr lang="en-US" sz="5200" b="1" dirty="0">
                 <a:solidFill>
                   <a:srgbClr val="FFFFFF"/>
                 </a:solidFill>
@@ -1776,14 +2093,17 @@
               </a:rPr>
               <a:t>А Ти до нового життя пробудив,</a:t>
             </a:r>
-            <a:endParaRPr lang="en-US" sz="4300" dirty="0"/>
-          </a:p>
-          <a:p>
-            <a:pPr algn="ctr" indent="0" marL="0">
-              <a:buNone/>
-            </a:pPr>
-            <a:r>
-              <a:rPr lang="en-US" sz="4300" b="1" dirty="0">
+            <a:endParaRPr lang="en-US" sz="5200" dirty="0"/>
+          </a:p>
+          <a:p>
+            <a:pPr algn="ctr" indent="0" marL="0">
+              <a:lnSpc>
+                <a:spcPts val="6200"/>
+              </a:lnSpc>
+              <a:buNone/>
+            </a:pPr>
+            <a:r>
+              <a:rPr lang="en-US" sz="5200" b="1" dirty="0">
                 <a:solidFill>
                   <a:srgbClr val="FFFFFF"/>
                 </a:solidFill>
@@ -1793,41 +2113,172 @@
               </a:rPr>
               <a:t>і серце, і душу мені обновив,</a:t>
             </a:r>
-            <a:endParaRPr lang="en-US" sz="4300" dirty="0"/>
-          </a:p>
-          <a:p>
-            <a:pPr algn="ctr" indent="0" marL="0">
-              <a:buNone/>
-            </a:pPr>
-            <a:r>
-              <a:rPr lang="en-US" sz="4300" b="1" dirty="0">
-                <a:solidFill>
-                  <a:srgbClr val="FFFFFF"/>
-                </a:solidFill>
-                <a:latin typeface="Arial" pitchFamily="34" charset="0"/>
-                <a:ea typeface="Arial" pitchFamily="34" charset="-122"/>
-                <a:cs typeface="Arial" pitchFamily="34" charset="-120"/>
-              </a:rPr>
-              <a:t>||: і очі відкрив Ти на пройдений шлях,</a:t>
-            </a:r>
-            <a:endParaRPr lang="en-US" sz="4300" dirty="0"/>
-          </a:p>
-          <a:p>
-            <a:pPr algn="ctr" indent="0" marL="0">
-              <a:buNone/>
-            </a:pPr>
-            <a:r>
-              <a:rPr lang="en-US" sz="4300" b="1" dirty="0">
-                <a:solidFill>
-                  <a:srgbClr val="FFFFFF"/>
-                </a:solidFill>
-                <a:latin typeface="Arial" pitchFamily="34" charset="0"/>
-                <a:ea typeface="Arial" pitchFamily="34" charset="-122"/>
-                <a:cs typeface="Arial" pitchFamily="34" charset="-120"/>
-              </a:rPr>
-              <a:t>не дав потонути в невірʼї, в гріхах. :||</a:t>
-            </a:r>
-            <a:endParaRPr lang="en-US" sz="4300" dirty="0"/>
+            <a:endParaRPr lang="en-US" sz="5200" dirty="0"/>
+          </a:p>
+          <a:p>
+            <a:pPr algn="ctr" indent="0" marL="0">
+              <a:lnSpc>
+                <a:spcPts val="6200"/>
+              </a:lnSpc>
+              <a:buNone/>
+            </a:pPr>
+            <a:r>
+              <a:rPr lang="en-US" sz="5200" b="1" dirty="0">
+                <a:solidFill>
+                  <a:srgbClr val="FFFFFF"/>
+                </a:solidFill>
+                <a:latin typeface="Arial" pitchFamily="34" charset="0"/>
+                <a:ea typeface="Arial" pitchFamily="34" charset="-122"/>
+                <a:cs typeface="Arial" pitchFamily="34" charset="-120"/>
+              </a:rPr>
+              <a:t>і очі відкрив Ти на</a:t>
+            </a:r>
+            <a:endParaRPr lang="en-US" sz="5200" dirty="0"/>
+          </a:p>
+          <a:p>
+            <a:pPr algn="ctr" indent="0" marL="0">
+              <a:lnSpc>
+                <a:spcPts val="6200"/>
+              </a:lnSpc>
+              <a:buNone/>
+            </a:pPr>
+            <a:r>
+              <a:rPr lang="en-US" sz="5200" b="1" dirty="0">
+                <a:solidFill>
+                  <a:srgbClr val="FFFFFF"/>
+                </a:solidFill>
+                <a:latin typeface="Arial" pitchFamily="34" charset="0"/>
+                <a:ea typeface="Arial" pitchFamily="34" charset="-122"/>
+                <a:cs typeface="Arial" pitchFamily="34" charset="-120"/>
+              </a:rPr>
+              <a:t>пройдений шлях,</a:t>
+            </a:r>
+            <a:endParaRPr lang="en-US" sz="5200" dirty="0"/>
+          </a:p>
+          <a:p>
+            <a:pPr algn="ctr" indent="0" marL="0">
+              <a:lnSpc>
+                <a:spcPts val="6200"/>
+              </a:lnSpc>
+              <a:buNone/>
+            </a:pPr>
+            <a:r>
+              <a:rPr lang="en-US" sz="5200" b="1" dirty="0">
+                <a:solidFill>
+                  <a:srgbClr val="FFFFFF"/>
+                </a:solidFill>
+                <a:latin typeface="Arial" pitchFamily="34" charset="0"/>
+                <a:ea typeface="Arial" pitchFamily="34" charset="-122"/>
+                <a:cs typeface="Arial" pitchFamily="34" charset="-120"/>
+              </a:rPr>
+              <a:t>не дав потонути</a:t>
+            </a:r>
+            <a:endParaRPr lang="en-US" sz="5200" dirty="0"/>
+          </a:p>
+          <a:p>
+            <a:pPr algn="ctr" indent="0" marL="0">
+              <a:lnSpc>
+                <a:spcPts val="6200"/>
+              </a:lnSpc>
+              <a:buNone/>
+            </a:pPr>
+            <a:r>
+              <a:rPr lang="en-US" sz="5200" b="1" dirty="0">
+                <a:solidFill>
+                  <a:srgbClr val="FFFFFF"/>
+                </a:solidFill>
+                <a:latin typeface="Arial" pitchFamily="34" charset="0"/>
+                <a:ea typeface="Arial" pitchFamily="34" charset="-122"/>
+                <a:cs typeface="Arial" pitchFamily="34" charset="-120"/>
+              </a:rPr>
+              <a:t>в невірʼї, в гріхах.</a:t>
+            </a:r>
+            <a:endParaRPr lang="en-US" sz="5200" dirty="0"/>
+          </a:p>
+        </p:txBody>
+      </p:sp>
+      <p:sp>
+        <p:nvSpPr>
+          <p:cNvPr id="3" name="Shape 1"/>
+          <p:cNvSpPr/>
+          <p:nvPr/>
+        </p:nvSpPr>
+        <p:spPr>
+          <a:xfrm>
+            <a:off x="2858135" y="2755392"/>
+            <a:ext cx="0" cy="2971800"/>
+          </a:xfrm>
+          <a:prstGeom prst="line">
+            <a:avLst/>
+          </a:prstGeom>
+          <a:noFill/>
+          <a:ln w="25400">
+            <a:solidFill>
+              <a:srgbClr val="8A8A8A"/>
+            </a:solidFill>
+            <a:prstDash val="solid"/>
+          </a:ln>
+        </p:spPr>
+      </p:sp>
+      <p:sp>
+        <p:nvSpPr>
+          <p:cNvPr id="4" name="Shape 2"/>
+          <p:cNvSpPr/>
+          <p:nvPr/>
+        </p:nvSpPr>
+        <p:spPr>
+          <a:xfrm>
+            <a:off x="9339961" y="2755392"/>
+            <a:ext cx="0" cy="2971800"/>
+          </a:xfrm>
+          <a:prstGeom prst="line">
+            <a:avLst/>
+          </a:prstGeom>
+          <a:noFill/>
+          <a:ln w="25400">
+            <a:solidFill>
+              <a:srgbClr val="8A8A8A"/>
+            </a:solidFill>
+            <a:prstDash val="solid"/>
+          </a:ln>
+        </p:spPr>
+      </p:sp>
+      <p:sp>
+        <p:nvSpPr>
+          <p:cNvPr id="5" name="Text 3"/>
+          <p:cNvSpPr txBox="1"/>
+          <p:nvPr/>
+        </p:nvSpPr>
+        <p:spPr>
+          <a:xfrm>
+            <a:off x="9439021" y="3921252"/>
+            <a:ext cx="1097280" cy="640080"/>
+          </a:xfrm>
+          <a:prstGeom prst="rect">
+            <a:avLst/>
+          </a:prstGeom>
+          <a:noFill/>
+          <a:ln/>
+        </p:spPr>
+        <p:txBody>
+          <a:bodyPr wrap="square" lIns="0" tIns="0" rIns="0" bIns="0" rtlCol="0" anchor="ctr"/>
+          <a:lstStyle/>
+          <a:p>
+            <a:pPr algn="l" indent="0" marL="0">
+              <a:buNone/>
+            </a:pPr>
+            <a:r>
+              <a:rPr lang="en-US" sz="3600" b="1" dirty="0">
+                <a:solidFill>
+                  <a:srgbClr val="BBBBBB"/>
+                </a:solidFill>
+                <a:latin typeface="Arial" pitchFamily="34" charset="0"/>
+                <a:ea typeface="Arial" pitchFamily="34" charset="-122"/>
+                <a:cs typeface="Arial" pitchFamily="34" charset="-120"/>
+              </a:rPr>
+              <a:t>×2</a:t>
+            </a:r>
+            <a:endParaRPr lang="en-US" sz="3600" dirty="0"/>
           </a:p>
         </p:txBody>
       </p:sp>
@@ -1885,10 +2336,13 @@
           <a:lstStyle/>
           <a:p>
             <a:pPr algn="ctr" indent="0" marL="0">
-              <a:buNone/>
-            </a:pPr>
-            <a:r>
-              <a:rPr lang="en-US" sz="4300" b="1" dirty="0">
+              <a:lnSpc>
+                <a:spcPts val="6200"/>
+              </a:lnSpc>
+              <a:buNone/>
+            </a:pPr>
+            <a:r>
+              <a:rPr lang="en-US" sz="5200" b="1" dirty="0">
                 <a:solidFill>
                   <a:srgbClr val="FFFFFF"/>
                 </a:solidFill>
@@ -1898,14 +2352,17 @@
               </a:rPr>
               <a:t>І ось я в молитві покірно стою,</a:t>
             </a:r>
-            <a:endParaRPr lang="en-US" sz="4300" dirty="0"/>
-          </a:p>
-          <a:p>
-            <a:pPr algn="ctr" indent="0" marL="0">
-              <a:buNone/>
-            </a:pPr>
-            <a:r>
-              <a:rPr lang="en-US" sz="4300" b="1" dirty="0">
+            <a:endParaRPr lang="en-US" sz="5200" dirty="0"/>
+          </a:p>
+          <a:p>
+            <a:pPr algn="ctr" indent="0" marL="0">
+              <a:lnSpc>
+                <a:spcPts val="6200"/>
+              </a:lnSpc>
+              <a:buNone/>
+            </a:pPr>
+            <a:r>
+              <a:rPr lang="en-US" sz="5200" b="1" dirty="0">
                 <a:solidFill>
                   <a:srgbClr val="FFFFFF"/>
                 </a:solidFill>
@@ -1915,41 +2372,172 @@
               </a:rPr>
               <a:t>життя все навіки Тобі віддаю,</a:t>
             </a:r>
-            <a:endParaRPr lang="en-US" sz="4300" dirty="0"/>
-          </a:p>
-          <a:p>
-            <a:pPr algn="ctr" indent="0" marL="0">
-              <a:buNone/>
-            </a:pPr>
-            <a:r>
-              <a:rPr lang="en-US" sz="4300" b="1" dirty="0">
-                <a:solidFill>
-                  <a:srgbClr val="FFFFFF"/>
-                </a:solidFill>
-                <a:latin typeface="Arial" pitchFamily="34" charset="0"/>
-                <a:ea typeface="Arial" pitchFamily="34" charset="-122"/>
-                <a:cs typeface="Arial" pitchFamily="34" charset="-120"/>
-              </a:rPr>
-              <a:t>||: я хочу належати тільки Тобі –</a:t>
-            </a:r>
-            <a:endParaRPr lang="en-US" sz="4300" dirty="0"/>
-          </a:p>
-          <a:p>
-            <a:pPr algn="ctr" indent="0" marL="0">
-              <a:buNone/>
-            </a:pPr>
-            <a:r>
-              <a:rPr lang="en-US" sz="4300" b="1" dirty="0">
-                <a:solidFill>
-                  <a:srgbClr val="FFFFFF"/>
-                </a:solidFill>
-                <a:latin typeface="Arial" pitchFamily="34" charset="0"/>
-                <a:ea typeface="Arial" pitchFamily="34" charset="-122"/>
-                <a:cs typeface="Arial" pitchFamily="34" charset="-120"/>
-              </a:rPr>
-              <a:t>підтримай мене у земній боротьбі. :||</a:t>
-            </a:r>
-            <a:endParaRPr lang="en-US" sz="4300" dirty="0"/>
+            <a:endParaRPr lang="en-US" sz="5200" dirty="0"/>
+          </a:p>
+          <a:p>
+            <a:pPr algn="ctr" indent="0" marL="0">
+              <a:lnSpc>
+                <a:spcPts val="6200"/>
+              </a:lnSpc>
+              <a:buNone/>
+            </a:pPr>
+            <a:r>
+              <a:rPr lang="en-US" sz="5200" b="1" dirty="0">
+                <a:solidFill>
+                  <a:srgbClr val="FFFFFF"/>
+                </a:solidFill>
+                <a:latin typeface="Arial" pitchFamily="34" charset="0"/>
+                <a:ea typeface="Arial" pitchFamily="34" charset="-122"/>
+                <a:cs typeface="Arial" pitchFamily="34" charset="-120"/>
+              </a:rPr>
+              <a:t>я хочу належати</a:t>
+            </a:r>
+            <a:endParaRPr lang="en-US" sz="5200" dirty="0"/>
+          </a:p>
+          <a:p>
+            <a:pPr algn="ctr" indent="0" marL="0">
+              <a:lnSpc>
+                <a:spcPts val="6200"/>
+              </a:lnSpc>
+              <a:buNone/>
+            </a:pPr>
+            <a:r>
+              <a:rPr lang="en-US" sz="5200" b="1" dirty="0">
+                <a:solidFill>
+                  <a:srgbClr val="FFFFFF"/>
+                </a:solidFill>
+                <a:latin typeface="Arial" pitchFamily="34" charset="0"/>
+                <a:ea typeface="Arial" pitchFamily="34" charset="-122"/>
+                <a:cs typeface="Arial" pitchFamily="34" charset="-120"/>
+              </a:rPr>
+              <a:t>тільки Тобі –</a:t>
+            </a:r>
+            <a:endParaRPr lang="en-US" sz="5200" dirty="0"/>
+          </a:p>
+          <a:p>
+            <a:pPr algn="ctr" indent="0" marL="0">
+              <a:lnSpc>
+                <a:spcPts val="6200"/>
+              </a:lnSpc>
+              <a:buNone/>
+            </a:pPr>
+            <a:r>
+              <a:rPr lang="en-US" sz="5200" b="1" dirty="0">
+                <a:solidFill>
+                  <a:srgbClr val="FFFFFF"/>
+                </a:solidFill>
+                <a:latin typeface="Arial" pitchFamily="34" charset="0"/>
+                <a:ea typeface="Arial" pitchFamily="34" charset="-122"/>
+                <a:cs typeface="Arial" pitchFamily="34" charset="-120"/>
+              </a:rPr>
+              <a:t>підтримай мене у</a:t>
+            </a:r>
+            <a:endParaRPr lang="en-US" sz="5200" dirty="0"/>
+          </a:p>
+          <a:p>
+            <a:pPr algn="ctr" indent="0" marL="0">
+              <a:lnSpc>
+                <a:spcPts val="6200"/>
+              </a:lnSpc>
+              <a:buNone/>
+            </a:pPr>
+            <a:r>
+              <a:rPr lang="en-US" sz="5200" b="1" dirty="0">
+                <a:solidFill>
+                  <a:srgbClr val="FFFFFF"/>
+                </a:solidFill>
+                <a:latin typeface="Arial" pitchFamily="34" charset="0"/>
+                <a:ea typeface="Arial" pitchFamily="34" charset="-122"/>
+                <a:cs typeface="Arial" pitchFamily="34" charset="-120"/>
+              </a:rPr>
+              <a:t>земній боротьбі.</a:t>
+            </a:r>
+            <a:endParaRPr lang="en-US" sz="5200" dirty="0"/>
+          </a:p>
+        </p:txBody>
+      </p:sp>
+      <p:sp>
+        <p:nvSpPr>
+          <p:cNvPr id="3" name="Shape 1"/>
+          <p:cNvSpPr/>
+          <p:nvPr/>
+        </p:nvSpPr>
+        <p:spPr>
+          <a:xfrm>
+            <a:off x="2991206" y="2755392"/>
+            <a:ext cx="0" cy="2971800"/>
+          </a:xfrm>
+          <a:prstGeom prst="line">
+            <a:avLst/>
+          </a:prstGeom>
+          <a:noFill/>
+          <a:ln w="25400">
+            <a:solidFill>
+              <a:srgbClr val="8A8A8A"/>
+            </a:solidFill>
+            <a:prstDash val="solid"/>
+          </a:ln>
+        </p:spPr>
+      </p:sp>
+      <p:sp>
+        <p:nvSpPr>
+          <p:cNvPr id="4" name="Shape 2"/>
+          <p:cNvSpPr/>
+          <p:nvPr/>
+        </p:nvSpPr>
+        <p:spPr>
+          <a:xfrm>
+            <a:off x="9206890" y="2755392"/>
+            <a:ext cx="0" cy="2971800"/>
+          </a:xfrm>
+          <a:prstGeom prst="line">
+            <a:avLst/>
+          </a:prstGeom>
+          <a:noFill/>
+          <a:ln w="25400">
+            <a:solidFill>
+              <a:srgbClr val="8A8A8A"/>
+            </a:solidFill>
+            <a:prstDash val="solid"/>
+          </a:ln>
+        </p:spPr>
+      </p:sp>
+      <p:sp>
+        <p:nvSpPr>
+          <p:cNvPr id="5" name="Text 3"/>
+          <p:cNvSpPr txBox="1"/>
+          <p:nvPr/>
+        </p:nvSpPr>
+        <p:spPr>
+          <a:xfrm>
+            <a:off x="9305950" y="3921252"/>
+            <a:ext cx="1097280" cy="640080"/>
+          </a:xfrm>
+          <a:prstGeom prst="rect">
+            <a:avLst/>
+          </a:prstGeom>
+          <a:noFill/>
+          <a:ln/>
+        </p:spPr>
+        <p:txBody>
+          <a:bodyPr wrap="square" lIns="0" tIns="0" rIns="0" bIns="0" rtlCol="0" anchor="ctr"/>
+          <a:lstStyle/>
+          <a:p>
+            <a:pPr algn="l" indent="0" marL="0">
+              <a:buNone/>
+            </a:pPr>
+            <a:r>
+              <a:rPr lang="en-US" sz="3600" b="1" dirty="0">
+                <a:solidFill>
+                  <a:srgbClr val="BBBBBB"/>
+                </a:solidFill>
+                <a:latin typeface="Arial" pitchFamily="34" charset="0"/>
+                <a:ea typeface="Arial" pitchFamily="34" charset="-122"/>
+                <a:cs typeface="Arial" pitchFamily="34" charset="-120"/>
+              </a:rPr>
+              <a:t>×2</a:t>
+            </a:r>
+            <a:endParaRPr lang="en-US" sz="3600" dirty="0"/>
           </a:p>
         </p:txBody>
       </p:sp>
@@ -2007,10 +2595,13 @@
           <a:lstStyle/>
           <a:p>
             <a:pPr algn="ctr" indent="0" marL="0">
-              <a:buNone/>
-            </a:pPr>
-            <a:r>
-              <a:rPr lang="en-US" sz="4300" b="1" dirty="0">
+              <a:lnSpc>
+                <a:spcPts val="6200"/>
+              </a:lnSpc>
+              <a:buNone/>
+            </a:pPr>
+            <a:r>
+              <a:rPr lang="en-US" sz="5200" b="1" dirty="0">
                 <a:solidFill>
                   <a:srgbClr val="FFFFFF"/>
                 </a:solidFill>
@@ -2020,64 +2611,218 @@
               </a:rPr>
               <a:t>Я словом і ділом прославлю Тебе</a:t>
             </a:r>
-            <a:endParaRPr lang="en-US" sz="4300" dirty="0"/>
-          </a:p>
-          <a:p>
-            <a:pPr algn="ctr" indent="0" marL="0">
-              <a:buNone/>
-            </a:pPr>
-            <a:r>
-              <a:rPr lang="en-US" sz="4300" b="1" dirty="0">
-                <a:solidFill>
-                  <a:srgbClr val="FFFFFF"/>
-                </a:solidFill>
-                <a:latin typeface="Arial" pitchFamily="34" charset="0"/>
-                <a:ea typeface="Arial" pitchFamily="34" charset="-122"/>
-                <a:cs typeface="Arial" pitchFamily="34" charset="-120"/>
-              </a:rPr>
-              <a:t>і вірю, що в небо Ти візьмеш мене.</a:t>
-            </a:r>
-            <a:endParaRPr lang="en-US" sz="4300" dirty="0"/>
-          </a:p>
-          <a:p>
-            <a:pPr algn="ctr" indent="0" marL="0">
-              <a:buNone/>
-            </a:pPr>
-            <a:r>
-              <a:rPr lang="en-US" sz="4300" b="1" dirty="0">
-                <a:solidFill>
-                  <a:srgbClr val="FFFFFF"/>
-                </a:solidFill>
-                <a:latin typeface="Arial" pitchFamily="34" charset="0"/>
-                <a:ea typeface="Arial" pitchFamily="34" charset="-122"/>
-                <a:cs typeface="Arial" pitchFamily="34" charset="-120"/>
-              </a:rPr>
-              <a:t>||: Хай світло засяє у вчинках моїх</a:t>
-            </a:r>
-            <a:endParaRPr lang="en-US" sz="4300" dirty="0"/>
-          </a:p>
-          <a:p>
-            <a:pPr algn="ctr" indent="0" marL="0">
-              <a:buNone/>
-            </a:pPr>
-            <a:r>
-              <a:rPr lang="en-US" sz="4300" b="1" dirty="0">
-                <a:solidFill>
-                  <a:srgbClr val="FFFFFF"/>
-                </a:solidFill>
-                <a:latin typeface="Arial" pitchFamily="34" charset="0"/>
-                <a:ea typeface="Arial" pitchFamily="34" charset="-122"/>
-                <a:cs typeface="Arial" pitchFamily="34" charset="-120"/>
-              </a:rPr>
-              <a:t>і вабить постійно до Тебе усіх. :||</a:t>
-            </a:r>
-            <a:endParaRPr lang="en-US" sz="4300" dirty="0"/>
+            <a:endParaRPr lang="en-US" sz="5200" dirty="0"/>
+          </a:p>
+          <a:p>
+            <a:pPr algn="ctr" indent="0" marL="0">
+              <a:lnSpc>
+                <a:spcPts val="6200"/>
+              </a:lnSpc>
+              <a:buNone/>
+            </a:pPr>
+            <a:r>
+              <a:rPr lang="en-US" sz="5200" b="1" dirty="0">
+                <a:solidFill>
+                  <a:srgbClr val="FFFFFF"/>
+                </a:solidFill>
+                <a:latin typeface="Arial" pitchFamily="34" charset="0"/>
+                <a:ea typeface="Arial" pitchFamily="34" charset="-122"/>
+                <a:cs typeface="Arial" pitchFamily="34" charset="-120"/>
+              </a:rPr>
+              <a:t>і вірю, що в небо</a:t>
+            </a:r>
+            <a:endParaRPr lang="en-US" sz="5200" dirty="0"/>
+          </a:p>
+          <a:p>
+            <a:pPr algn="ctr" indent="0" marL="0">
+              <a:lnSpc>
+                <a:spcPts val="6200"/>
+              </a:lnSpc>
+              <a:buNone/>
+            </a:pPr>
+            <a:r>
+              <a:rPr lang="en-US" sz="5200" b="1" dirty="0">
+                <a:solidFill>
+                  <a:srgbClr val="FFFFFF"/>
+                </a:solidFill>
+                <a:latin typeface="Arial" pitchFamily="34" charset="0"/>
+                <a:ea typeface="Arial" pitchFamily="34" charset="-122"/>
+                <a:cs typeface="Arial" pitchFamily="34" charset="-120"/>
+              </a:rPr>
+              <a:t>Ти візьмеш мене.</a:t>
+            </a:r>
+            <a:endParaRPr lang="en-US" sz="5200" dirty="0"/>
+          </a:p>
+          <a:p>
+            <a:pPr algn="ctr" indent="0" marL="0">
+              <a:lnSpc>
+                <a:spcPts val="6200"/>
+              </a:lnSpc>
+              <a:buNone/>
+            </a:pPr>
+            <a:r>
+              <a:rPr lang="en-US" sz="5200" b="1" dirty="0">
+                <a:solidFill>
+                  <a:srgbClr val="FFFFFF"/>
+                </a:solidFill>
+                <a:latin typeface="Arial" pitchFamily="34" charset="0"/>
+                <a:ea typeface="Arial" pitchFamily="34" charset="-122"/>
+                <a:cs typeface="Arial" pitchFamily="34" charset="-120"/>
+              </a:rPr>
+              <a:t>Хай світло засяє</a:t>
+            </a:r>
+            <a:endParaRPr lang="en-US" sz="5200" dirty="0"/>
+          </a:p>
+          <a:p>
+            <a:pPr algn="ctr" indent="0" marL="0">
+              <a:lnSpc>
+                <a:spcPts val="6200"/>
+              </a:lnSpc>
+              <a:buNone/>
+            </a:pPr>
+            <a:r>
+              <a:rPr lang="en-US" sz="5200" b="1" dirty="0">
+                <a:solidFill>
+                  <a:srgbClr val="FFFFFF"/>
+                </a:solidFill>
+                <a:latin typeface="Arial" pitchFamily="34" charset="0"/>
+                <a:ea typeface="Arial" pitchFamily="34" charset="-122"/>
+                <a:cs typeface="Arial" pitchFamily="34" charset="-120"/>
+              </a:rPr>
+              <a:t>у вчинках моїх</a:t>
+            </a:r>
+            <a:endParaRPr lang="en-US" sz="5200" dirty="0"/>
+          </a:p>
+          <a:p>
+            <a:pPr algn="ctr" indent="0" marL="0">
+              <a:lnSpc>
+                <a:spcPts val="6200"/>
+              </a:lnSpc>
+              <a:buNone/>
+            </a:pPr>
+            <a:r>
+              <a:rPr lang="en-US" sz="5200" b="1" dirty="0">
+                <a:solidFill>
+                  <a:srgbClr val="FFFFFF"/>
+                </a:solidFill>
+                <a:latin typeface="Arial" pitchFamily="34" charset="0"/>
+                <a:ea typeface="Arial" pitchFamily="34" charset="-122"/>
+                <a:cs typeface="Arial" pitchFamily="34" charset="-120"/>
+              </a:rPr>
+              <a:t>і вабить постійно</a:t>
+            </a:r>
+            <a:endParaRPr lang="en-US" sz="5200" dirty="0"/>
+          </a:p>
+          <a:p>
+            <a:pPr algn="ctr" indent="0" marL="0">
+              <a:lnSpc>
+                <a:spcPts val="6200"/>
+              </a:lnSpc>
+              <a:buNone/>
+            </a:pPr>
+            <a:r>
+              <a:rPr lang="en-US" sz="5200" b="1" dirty="0">
+                <a:solidFill>
+                  <a:srgbClr val="FFFFFF"/>
+                </a:solidFill>
+                <a:latin typeface="Arial" pitchFamily="34" charset="0"/>
+                <a:ea typeface="Arial" pitchFamily="34" charset="-122"/>
+                <a:cs typeface="Arial" pitchFamily="34" charset="-120"/>
+              </a:rPr>
+              <a:t>до Тебе усіх.</a:t>
+            </a:r>
+            <a:endParaRPr lang="en-US" sz="5200" dirty="0"/>
           </a:p>
         </p:txBody>
       </p:sp>
       <p:sp>
         <p:nvSpPr>
-          <p:cNvPr id="3" name="Text 1"/>
+          <p:cNvPr id="3" name="Shape 1"/>
+          <p:cNvSpPr/>
+          <p:nvPr/>
+        </p:nvSpPr>
+        <p:spPr>
+          <a:xfrm>
+            <a:off x="2991206" y="3151632"/>
+            <a:ext cx="0" cy="2971800"/>
+          </a:xfrm>
+          <a:prstGeom prst="line">
+            <a:avLst/>
+          </a:prstGeom>
+          <a:noFill/>
+          <a:ln w="25400">
+            <a:solidFill>
+              <a:srgbClr val="8A8A8A"/>
+            </a:solidFill>
+            <a:prstDash val="solid"/>
+          </a:ln>
+        </p:spPr>
+      </p:sp>
+      <p:sp>
+        <p:nvSpPr>
+          <p:cNvPr id="4" name="Shape 2"/>
+          <p:cNvSpPr/>
+          <p:nvPr/>
+        </p:nvSpPr>
+        <p:spPr>
+          <a:xfrm>
+            <a:off x="9206890" y="3151632"/>
+            <a:ext cx="0" cy="2971800"/>
+          </a:xfrm>
+          <a:prstGeom prst="line">
+            <a:avLst/>
+          </a:prstGeom>
+          <a:noFill/>
+          <a:ln w="25400">
+            <a:solidFill>
+              <a:srgbClr val="8A8A8A"/>
+            </a:solidFill>
+            <a:prstDash val="solid"/>
+          </a:ln>
+        </p:spPr>
+      </p:sp>
+      <p:sp>
+        <p:nvSpPr>
+          <p:cNvPr id="5" name="Text 3"/>
+          <p:cNvSpPr txBox="1"/>
+          <p:nvPr/>
+        </p:nvSpPr>
+        <p:spPr>
+          <a:xfrm>
+            <a:off x="9305950" y="4317492"/>
+            <a:ext cx="1097280" cy="640080"/>
+          </a:xfrm>
+          <a:prstGeom prst="rect">
+            <a:avLst/>
+          </a:prstGeom>
+          <a:noFill/>
+          <a:ln/>
+        </p:spPr>
+        <p:txBody>
+          <a:bodyPr wrap="square" lIns="0" tIns="0" rIns="0" bIns="0" rtlCol="0" anchor="ctr"/>
+          <a:lstStyle/>
+          <a:p>
+            <a:pPr algn="l" indent="0" marL="0">
+              <a:buNone/>
+            </a:pPr>
+            <a:r>
+              <a:rPr lang="en-US" sz="3600" b="1" dirty="0">
+                <a:solidFill>
+                  <a:srgbClr val="BBBBBB"/>
+                </a:solidFill>
+                <a:latin typeface="Arial" pitchFamily="34" charset="0"/>
+                <a:ea typeface="Arial" pitchFamily="34" charset="-122"/>
+                <a:cs typeface="Arial" pitchFamily="34" charset="-120"/>
+              </a:rPr>
+              <a:t>×2</a:t>
+            </a:r>
+            <a:endParaRPr lang="en-US" sz="3600" dirty="0"/>
+          </a:p>
+        </p:txBody>
+      </p:sp>
+      <p:sp>
+        <p:nvSpPr>
+          <p:cNvPr id="6" name="Text 4"/>
           <p:cNvSpPr txBox="1"/>
           <p:nvPr/>
         </p:nvSpPr>
